--- a/outputs/presentation/samsung-memory-scenario-planning-carbon-design.pptx
+++ b/outputs/presentation/samsung-memory-scenario-planning-carbon-design.pptx
@@ -11183,7 +11183,7 @@
                 <a:ea typeface="Malgun Gothic" pitchFamily="34" charset="-122"/>
                 <a:cs typeface="Malgun Gothic" pitchFamily="34" charset="-120"/>
               </a:rPr>
-              <a:t>2×2 매트릭스 + 와일드카드 E — 각 시나리오의 2035년 시장 규모와 확률</a:t>
+              <a:t>2×2 매트릭스 + 와일드카드 E — 각 시나리오의 2035년 시장 규모</a:t>
             </a:r>
             <a:endParaRPr lang="en-US" sz="1650" dirty="0"/>
           </a:p>
@@ -11474,50 +11474,6 @@
       </p:sp>
       <p:sp>
         <p:nvSpPr>
-          <p:cNvPr id="14" name="Text 12"/>
-          <p:cNvSpPr/>
-          <p:nvPr/>
-        </p:nvSpPr>
-        <p:spPr>
-          <a:xfrm>
-            <a:off x="1313408" y="2609850"/>
-            <a:ext cx="372070" cy="304800"/>
-          </a:xfrm>
-          <a:prstGeom prst="rect">
-            <a:avLst/>
-          </a:prstGeom>
-          <a:noFill/>
-          <a:ln/>
-        </p:spPr>
-        <p:txBody>
-          <a:bodyPr wrap="square" lIns="25400" tIns="25400" rIns="25400" bIns="25400" rtlCol="0" anchor="ctr">
-            <a:normAutofit/>
-          </a:bodyPr>
-          <a:lstStyle/>
-          <a:p>
-            <a:pPr algn="l" indent="0" marL="0">
-              <a:lnSpc>
-                <a:spcPct val="140000"/>
-              </a:lnSpc>
-              <a:buNone/>
-            </a:pPr>
-            <a:r>
-              <a:rPr lang="en-US" sz="1050" b="1" spc="38" kern="0" dirty="0">
-                <a:solidFill>
-                  <a:srgbClr val="991B1B"/>
-                </a:solidFill>
-                <a:latin typeface="Malgun Gothic" pitchFamily="34" charset="0"/>
-                <a:ea typeface="Malgun Gothic" pitchFamily="34" charset="-122"/>
-                <a:cs typeface="Malgun Gothic" pitchFamily="34" charset="-120"/>
-              </a:rPr>
-              <a:t>10–15%</a:t>
-            </a:r>
-            <a:endParaRPr lang="en-US" sz="1050" dirty="0"/>
-          </a:p>
-        </p:txBody>
-      </p:sp>
-      <p:sp>
-        <p:nvSpPr>
           <p:cNvPr id="15" name="Text 13"/>
           <p:cNvSpPr/>
           <p:nvPr/>
@@ -11714,50 +11670,6 @@
       </p:sp>
       <p:sp>
         <p:nvSpPr>
-          <p:cNvPr id="20" name="Text 18"/>
-          <p:cNvSpPr/>
-          <p:nvPr/>
-        </p:nvSpPr>
-        <p:spPr>
-          <a:xfrm>
-            <a:off x="5959227" y="3324225"/>
-            <a:ext cx="612725" cy="304800"/>
-          </a:xfrm>
-          <a:prstGeom prst="rect">
-            <a:avLst/>
-          </a:prstGeom>
-          <a:noFill/>
-          <a:ln/>
-        </p:spPr>
-        <p:txBody>
-          <a:bodyPr wrap="square" lIns="25400" tIns="25400" rIns="25400" bIns="25400" rtlCol="0" anchor="ctr">
-            <a:normAutofit/>
-          </a:bodyPr>
-          <a:lstStyle/>
-          <a:p>
-            <a:pPr algn="l" indent="0" marL="0">
-              <a:lnSpc>
-                <a:spcPct val="140000"/>
-              </a:lnSpc>
-              <a:buNone/>
-            </a:pPr>
-            <a:r>
-              <a:rPr lang="en-US" sz="1050" b="1" spc="38" kern="0" dirty="0">
-                <a:solidFill>
-                  <a:srgbClr val="92400E"/>
-                </a:solidFill>
-                <a:latin typeface="Malgun Gothic" pitchFamily="34" charset="0"/>
-                <a:ea typeface="Malgun Gothic" pitchFamily="34" charset="-122"/>
-                <a:cs typeface="Malgun Gothic" pitchFamily="34" charset="-120"/>
-              </a:rPr>
-              <a:t>25–30%</a:t>
-            </a:r>
-            <a:endParaRPr lang="en-US" sz="1050" dirty="0"/>
-          </a:p>
-        </p:txBody>
-      </p:sp>
-      <p:sp>
-        <p:nvSpPr>
           <p:cNvPr id="21" name="Text 19"/>
           <p:cNvSpPr/>
           <p:nvPr/>
@@ -11954,50 +11866,6 @@
       </p:sp>
       <p:sp>
         <p:nvSpPr>
-          <p:cNvPr id="26" name="Text 24"/>
-          <p:cNvSpPr/>
-          <p:nvPr/>
-        </p:nvSpPr>
-        <p:spPr>
-          <a:xfrm>
-            <a:off x="11340554" y="3324225"/>
-            <a:ext cx="612725" cy="304800"/>
-          </a:xfrm>
-          <a:prstGeom prst="rect">
-            <a:avLst/>
-          </a:prstGeom>
-          <a:noFill/>
-          <a:ln/>
-        </p:spPr>
-        <p:txBody>
-          <a:bodyPr wrap="square" lIns="25400" tIns="25400" rIns="25400" bIns="25400" rtlCol="0" anchor="ctr">
-            <a:normAutofit/>
-          </a:bodyPr>
-          <a:lstStyle/>
-          <a:p>
-            <a:pPr algn="l" indent="0" marL="0">
-              <a:lnSpc>
-                <a:spcPct val="140000"/>
-              </a:lnSpc>
-              <a:buNone/>
-            </a:pPr>
-            <a:r>
-              <a:rPr lang="en-US" sz="1050" b="1" spc="38" kern="0" dirty="0">
-                <a:solidFill>
-                  <a:srgbClr val="374151"/>
-                </a:solidFill>
-                <a:latin typeface="Malgun Gothic" pitchFamily="34" charset="0"/>
-                <a:ea typeface="Malgun Gothic" pitchFamily="34" charset="-122"/>
-                <a:cs typeface="Malgun Gothic" pitchFamily="34" charset="-120"/>
-              </a:rPr>
-              <a:t>20–25%</a:t>
-            </a:r>
-            <a:endParaRPr lang="en-US" sz="1050" dirty="0"/>
-          </a:p>
-        </p:txBody>
-      </p:sp>
-      <p:sp>
-        <p:nvSpPr>
           <p:cNvPr id="27" name="Text 25"/>
           <p:cNvSpPr/>
           <p:nvPr/>
@@ -12194,50 +12062,6 @@
       </p:sp>
       <p:sp>
         <p:nvSpPr>
-          <p:cNvPr id="32" name="Text 30"/>
-          <p:cNvSpPr/>
-          <p:nvPr/>
-        </p:nvSpPr>
-        <p:spPr>
-          <a:xfrm>
-            <a:off x="5949702" y="5524500"/>
-            <a:ext cx="612725" cy="304800"/>
-          </a:xfrm>
-          <a:prstGeom prst="rect">
-            <a:avLst/>
-          </a:prstGeom>
-          <a:noFill/>
-          <a:ln/>
-        </p:spPr>
-        <p:txBody>
-          <a:bodyPr wrap="square" lIns="25400" tIns="25400" rIns="25400" bIns="25400" rtlCol="0" anchor="ctr">
-            <a:normAutofit/>
-          </a:bodyPr>
-          <a:lstStyle/>
-          <a:p>
-            <a:pPr algn="l" indent="0" marL="0">
-              <a:lnSpc>
-                <a:spcPct val="140000"/>
-              </a:lnSpc>
-              <a:buNone/>
-            </a:pPr>
-            <a:r>
-              <a:rPr lang="en-US" sz="1050" b="1" spc="38" kern="0" dirty="0">
-                <a:solidFill>
-                  <a:srgbClr val="FFFFFF"/>
-                </a:solidFill>
-                <a:latin typeface="Malgun Gothic" pitchFamily="34" charset="0"/>
-                <a:ea typeface="Malgun Gothic" pitchFamily="34" charset="-122"/>
-                <a:cs typeface="Malgun Gothic" pitchFamily="34" charset="-120"/>
-              </a:rPr>
-              <a:t>30–35%</a:t>
-            </a:r>
-            <a:endParaRPr lang="en-US" sz="1050" dirty="0"/>
-          </a:p>
-        </p:txBody>
-      </p:sp>
-      <p:sp>
-        <p:nvSpPr>
           <p:cNvPr id="33" name="Text 31"/>
           <p:cNvSpPr/>
           <p:nvPr/>
@@ -12570,7 +12394,7 @@
                 <a:ea typeface="Malgun Gothic" pitchFamily="34" charset="-122"/>
                 <a:cs typeface="Malgun Gothic" pitchFamily="34" charset="-120"/>
               </a:rPr>
-              <a:t>확률</a:t>
+              <a:t/>
             </a:r>
             <a:endParaRPr lang="en-US" sz="1125" dirty="0"/>
           </a:p>
@@ -12614,7 +12438,7 @@
                 <a:ea typeface="Calibri" pitchFamily="34" charset="-122"/>
                 <a:cs typeface="Calibri" pitchFamily="34" charset="-120"/>
               </a:rPr>
-              <a:t>5—10%</a:t>
+              <a:t/>
             </a:r>
             <a:endParaRPr lang="en-US" sz="2100" dirty="0"/>
           </a:p>
@@ -13207,7 +13031,7 @@
                 <a:ea typeface="Malgun Gothic" pitchFamily="34" charset="-122"/>
                 <a:cs typeface="Malgun Gothic" pitchFamily="34" charset="-120"/>
               </a:rPr>
-              <a:t>확률 30 ~ 35% · 2035 시장 $520B · 4개 전제 조건 충족 시 매출 $1,200억 달성</a:t>
+              <a:t>최유력 시나리오 · 2035 시장 $520B · 4개 전제 조건 충족 시 매출 $1,200억 달성</a:t>
             </a:r>
             <a:endParaRPr lang="en-US" sz="1650" dirty="0"/>
           </a:p>
@@ -13407,7 +13231,7 @@
                 <a:ea typeface="Calibri" pitchFamily="34" charset="-122"/>
                 <a:cs typeface="Calibri" pitchFamily="34" charset="-120"/>
               </a:rPr>
-              <a:t>확률</a:t>
+              <a:t>판정</a:t>
             </a:r>
             <a:endParaRPr lang="en-US" sz="1125" dirty="0"/>
           </a:p>
@@ -13451,7 +13275,7 @@
                 <a:ea typeface="Calibri" pitchFamily="34" charset="-122"/>
                 <a:cs typeface="Calibri" pitchFamily="34" charset="-120"/>
               </a:rPr>
-              <a:t>30—35%</a:t>
+              <a:t>최유력</a:t>
             </a:r>
             <a:endParaRPr lang="en-US" sz="2400" dirty="0"/>
           </a:p>
@@ -15439,7 +15263,7 @@
                 <a:ea typeface="Malgun Gothic" pitchFamily="34" charset="-122"/>
                 <a:cs typeface="Malgun Gothic" pitchFamily="34" charset="-120"/>
               </a:rPr>
-              <a:t>25 – 30% 확률</a:t>
+              <a:t/>
             </a:r>
             <a:endParaRPr lang="en-US" sz="1125" dirty="0"/>
           </a:p>
@@ -15955,7 +15779,7 @@
                 <a:ea typeface="Malgun Gothic" pitchFamily="34" charset="-122"/>
                 <a:cs typeface="Malgun Gothic" pitchFamily="34" charset="-120"/>
               </a:rPr>
-              <a:t>10 – 15% 확률</a:t>
+              <a:t/>
             </a:r>
             <a:endParaRPr lang="en-US" sz="1125" dirty="0"/>
           </a:p>
@@ -16471,7 +16295,7 @@
                 <a:ea typeface="Malgun Gothic" pitchFamily="34" charset="-122"/>
                 <a:cs typeface="Malgun Gothic" pitchFamily="34" charset="-120"/>
               </a:rPr>
-              <a:t>20 – 25% 확률</a:t>
+              <a:t/>
             </a:r>
             <a:endParaRPr lang="en-US" sz="1125" dirty="0"/>
           </a:p>
@@ -16987,7 +16811,7 @@
                 <a:ea typeface="Malgun Gothic" pitchFamily="34" charset="-122"/>
                 <a:cs typeface="Malgun Gothic" pitchFamily="34" charset="-120"/>
               </a:rPr>
-              <a:t>5 – 10% 확률 · 와일드카드</a:t>
+              <a:t>와일드카드</a:t>
             </a:r>
             <a:endParaRPr lang="en-US" sz="1125" dirty="0"/>
           </a:p>
